--- a/@Materi Kuliah/Materi_Analisis_Survival/Presentasi_Analisis_Survival_Profesional_dari_HTML.pptx
+++ b/@Materi Kuliah/Materi_Analisis_Survival/Presentasi_Analisis_Survival_Profesional_dari_HTML.pptx
@@ -2,131 +2,36 @@
 <file path=ppt/presentation.xml><?xml version="1.0" encoding="utf-8"?>
 <p:presentation xmlns:p="http://schemas.openxmlformats.org/presentationml/2006/main">
   <p:sldMasterIdLst>
-    <p:sldMasterId xmlns:r="http://schemas.openxmlformats.org/officeDocument/2006/relationships" id="2147483648" r:id="R650e8a3d8cfa4fe7"/>
+    <p:sldMasterId xmlns:r="http://schemas.openxmlformats.org/officeDocument/2006/relationships" id="2147483648" r:id="R8259cf48ac2a4f67"/>
   </p:sldMasterIdLst>
   <p:notesMasterIdLst>
-    <p:notesMasterId xmlns:r="http://schemas.openxmlformats.org/officeDocument/2006/relationships" r:id="R144389ce16bf4800"/>
+    <p:notesMasterId xmlns:r="http://schemas.openxmlformats.org/officeDocument/2006/relationships" r:id="R993a6946db804ff8"/>
   </p:notesMasterIdLst>
   <p:sldIdLst>
-    <p:sldId xmlns:r="http://schemas.openxmlformats.org/officeDocument/2006/relationships" id="256" r:id="R64467d56a52d42d4"/>
-    <p:sldId xmlns:r="http://schemas.openxmlformats.org/officeDocument/2006/relationships" id="257" r:id="R6d6ecc6eff004a3e"/>
-    <p:sldId xmlns:r="http://schemas.openxmlformats.org/officeDocument/2006/relationships" id="258" r:id="R28c2172dfd704297"/>
-    <p:sldId xmlns:r="http://schemas.openxmlformats.org/officeDocument/2006/relationships" id="259" r:id="R6dfca65b58f44d1c"/>
-    <p:sldId xmlns:r="http://schemas.openxmlformats.org/officeDocument/2006/relationships" id="260" r:id="R6ddfbe75697a4460"/>
-    <p:sldId xmlns:r="http://schemas.openxmlformats.org/officeDocument/2006/relationships" id="261" r:id="R502d89c063a845fd"/>
-    <p:sldId xmlns:r="http://schemas.openxmlformats.org/officeDocument/2006/relationships" id="262" r:id="R8610337c2f2c4ffb"/>
-    <p:sldId xmlns:r="http://schemas.openxmlformats.org/officeDocument/2006/relationships" id="263" r:id="R3ffca017fb494638"/>
-    <p:sldId xmlns:r="http://schemas.openxmlformats.org/officeDocument/2006/relationships" id="264" r:id="Rafe406b1ae5a4f8a"/>
-    <p:sldId xmlns:r="http://schemas.openxmlformats.org/officeDocument/2006/relationships" id="265" r:id="R26b5cdc8ff434fe4"/>
-    <p:sldId xmlns:r="http://schemas.openxmlformats.org/officeDocument/2006/relationships" id="266" r:id="Rc7dfe950addc42c5"/>
-    <p:sldId xmlns:r="http://schemas.openxmlformats.org/officeDocument/2006/relationships" id="267" r:id="R528ba9398ed64eef"/>
-    <p:sldId xmlns:r="http://schemas.openxmlformats.org/officeDocument/2006/relationships" id="268" r:id="R07b27c1fbfc14dd5"/>
-    <p:sldId xmlns:r="http://schemas.openxmlformats.org/officeDocument/2006/relationships" id="269" r:id="Ra5b62fcac88e48c3"/>
-    <p:sldId xmlns:r="http://schemas.openxmlformats.org/officeDocument/2006/relationships" id="270" r:id="R1987b6512762433e"/>
-    <p:sldId xmlns:r="http://schemas.openxmlformats.org/officeDocument/2006/relationships" id="271" r:id="R0fcc328d45074e1b"/>
-    <p:sldId xmlns:r="http://schemas.openxmlformats.org/officeDocument/2006/relationships" id="272" r:id="R2bee8a3f039540a3"/>
-    <p:sldId xmlns:r="http://schemas.openxmlformats.org/officeDocument/2006/relationships" id="273" r:id="R28361885c8314ef8"/>
-    <p:sldId xmlns:r="http://schemas.openxmlformats.org/officeDocument/2006/relationships" id="274" r:id="R3769e5a7cb64432b"/>
-    <p:sldId xmlns:r="http://schemas.openxmlformats.org/officeDocument/2006/relationships" id="275" r:id="Rd6a1590530044434"/>
-    <p:sldId xmlns:r="http://schemas.openxmlformats.org/officeDocument/2006/relationships" id="276" r:id="R5da8e2386ce64ba1"/>
+    <p:sldId xmlns:r="http://schemas.openxmlformats.org/officeDocument/2006/relationships" id="256" r:id="Rbdc18260e6c749a5"/>
+    <p:sldId xmlns:r="http://schemas.openxmlformats.org/officeDocument/2006/relationships" id="257" r:id="R02f2264f33db4b28"/>
+    <p:sldId xmlns:r="http://schemas.openxmlformats.org/officeDocument/2006/relationships" id="258" r:id="R9da01ba8b24145af"/>
+    <p:sldId xmlns:r="http://schemas.openxmlformats.org/officeDocument/2006/relationships" id="259" r:id="R8739303098394fb6"/>
+    <p:sldId xmlns:r="http://schemas.openxmlformats.org/officeDocument/2006/relationships" id="260" r:id="R9ab0bd38230a47bb"/>
+    <p:sldId xmlns:r="http://schemas.openxmlformats.org/officeDocument/2006/relationships" id="261" r:id="R9cec0ad784374d71"/>
+    <p:sldId xmlns:r="http://schemas.openxmlformats.org/officeDocument/2006/relationships" id="262" r:id="R049e6326dc9d4ab0"/>
+    <p:sldId xmlns:r="http://schemas.openxmlformats.org/officeDocument/2006/relationships" id="263" r:id="R6ddf603ec9bf4338"/>
+    <p:sldId xmlns:r="http://schemas.openxmlformats.org/officeDocument/2006/relationships" id="264" r:id="Ree8f95461ed34604"/>
+    <p:sldId xmlns:r="http://schemas.openxmlformats.org/officeDocument/2006/relationships" id="265" r:id="R610c5f802498442a"/>
+    <p:sldId xmlns:r="http://schemas.openxmlformats.org/officeDocument/2006/relationships" id="266" r:id="R35b73f3832b14bd7"/>
+    <p:sldId xmlns:r="http://schemas.openxmlformats.org/officeDocument/2006/relationships" id="267" r:id="Ra54ef05a0142451b"/>
+    <p:sldId xmlns:r="http://schemas.openxmlformats.org/officeDocument/2006/relationships" id="268" r:id="Rc3582c2517da4f10"/>
+    <p:sldId xmlns:r="http://schemas.openxmlformats.org/officeDocument/2006/relationships" id="269" r:id="Re37187c570f64fc5"/>
+    <p:sldId xmlns:r="http://schemas.openxmlformats.org/officeDocument/2006/relationships" id="270" r:id="R8d1329a7ce324a1a"/>
+    <p:sldId xmlns:r="http://schemas.openxmlformats.org/officeDocument/2006/relationships" id="271" r:id="Rc6443de368e4437e"/>
+    <p:sldId xmlns:r="http://schemas.openxmlformats.org/officeDocument/2006/relationships" id="272" r:id="R583d9c3ba5a04751"/>
+    <p:sldId xmlns:r="http://schemas.openxmlformats.org/officeDocument/2006/relationships" id="273" r:id="Rd8335127524e4aec"/>
+    <p:sldId xmlns:r="http://schemas.openxmlformats.org/officeDocument/2006/relationships" id="274" r:id="Re55e0092160442d6"/>
+    <p:sldId xmlns:r="http://schemas.openxmlformats.org/officeDocument/2006/relationships" id="275" r:id="R65ed06ac76e740f8"/>
+    <p:sldId xmlns:r="http://schemas.openxmlformats.org/officeDocument/2006/relationships" id="276" r:id="Rd3d3613d4133478b"/>
   </p:sldIdLst>
   <p:sldSz cx="12192000" cy="6858000"/>
   <p:notesSz cx="6858000" cy="9144000"/>
-  <p:defaultTextStyle>
-    <a:defPPr xmlns:a="http://schemas.openxmlformats.org/drawingml/2006/main">
-      <a:defRPr lang="en-US"/>
-    </a:defPPr>
-    <a:lvl1pPr xmlns:a="http://schemas.openxmlformats.org/drawingml/2006/main" marL="0" indent="0" algn="l" defTabSz="914400">
-      <a:defRPr sz="1800" kern="1200">
-        <a:solidFill>
-          <a:schemeClr val="tx1"/>
-        </a:solidFill>
-        <a:latin typeface="+mn-lt"/>
-        <a:ea typeface="+mn-ea"/>
-        <a:cs typeface="+mn-cs"/>
-      </a:defRPr>
-    </a:lvl1pPr>
-    <a:lvl2pPr xmlns:a="http://schemas.openxmlformats.org/drawingml/2006/main" marL="457200" indent="0" algn="l" defTabSz="914400">
-      <a:defRPr sz="1800" kern="1200">
-        <a:solidFill>
-          <a:schemeClr val="tx1"/>
-        </a:solidFill>
-        <a:latin typeface="+mn-lt"/>
-        <a:ea typeface="+mn-ea"/>
-        <a:cs typeface="+mn-cs"/>
-      </a:defRPr>
-    </a:lvl2pPr>
-    <a:lvl3pPr xmlns:a="http://schemas.openxmlformats.org/drawingml/2006/main" marL="914400" indent="0" algn="l" defTabSz="914400">
-      <a:defRPr sz="1800" kern="1200">
-        <a:solidFill>
-          <a:schemeClr val="tx1"/>
-        </a:solidFill>
-        <a:latin typeface="+mn-lt"/>
-        <a:ea typeface="+mn-ea"/>
-        <a:cs typeface="+mn-cs"/>
-      </a:defRPr>
-    </a:lvl3pPr>
-    <a:lvl4pPr xmlns:a="http://schemas.openxmlformats.org/drawingml/2006/main" marL="1371600" indent="0" algn="l" defTabSz="914400">
-      <a:defRPr sz="1800" kern="1200">
-        <a:solidFill>
-          <a:schemeClr val="tx1"/>
-        </a:solidFill>
-        <a:latin typeface="+mn-lt"/>
-        <a:ea typeface="+mn-ea"/>
-        <a:cs typeface="+mn-cs"/>
-      </a:defRPr>
-    </a:lvl4pPr>
-    <a:lvl5pPr xmlns:a="http://schemas.openxmlformats.org/drawingml/2006/main" marL="1828800" indent="0" algn="l" defTabSz="914400">
-      <a:defRPr sz="1800" kern="1200">
-        <a:solidFill>
-          <a:schemeClr val="tx1"/>
-        </a:solidFill>
-        <a:latin typeface="+mn-lt"/>
-        <a:ea typeface="+mn-ea"/>
-        <a:cs typeface="+mn-cs"/>
-      </a:defRPr>
-    </a:lvl5pPr>
-    <a:lvl6pPr xmlns:a="http://schemas.openxmlformats.org/drawingml/2006/main" marL="2286000" indent="0" algn="l" defTabSz="914400">
-      <a:defRPr sz="1800" kern="1200">
-        <a:solidFill>
-          <a:schemeClr val="tx1"/>
-        </a:solidFill>
-        <a:latin typeface="+mn-lt"/>
-        <a:ea typeface="+mn-ea"/>
-        <a:cs typeface="+mn-cs"/>
-      </a:defRPr>
-    </a:lvl6pPr>
-    <a:lvl7pPr xmlns:a="http://schemas.openxmlformats.org/drawingml/2006/main" marL="2743200" indent="0" algn="l" defTabSz="914400">
-      <a:defRPr sz="1800" kern="1200">
-        <a:solidFill>
-          <a:schemeClr val="tx1"/>
-        </a:solidFill>
-        <a:latin typeface="+mn-lt"/>
-        <a:ea typeface="+mn-ea"/>
-        <a:cs typeface="+mn-cs"/>
-      </a:defRPr>
-    </a:lvl7pPr>
-    <a:lvl8pPr xmlns:a="http://schemas.openxmlformats.org/drawingml/2006/main" marL="3200400" indent="0" algn="l" defTabSz="914400">
-      <a:defRPr sz="1800" kern="1200">
-        <a:solidFill>
-          <a:schemeClr val="tx1"/>
-        </a:solidFill>
-        <a:latin typeface="+mn-lt"/>
-        <a:ea typeface="+mn-ea"/>
-        <a:cs typeface="+mn-cs"/>
-      </a:defRPr>
-    </a:lvl8pPr>
-    <a:lvl9pPr xmlns:a="http://schemas.openxmlformats.org/drawingml/2006/main" marL="3657600" indent="0" algn="l" defTabSz="914400">
-      <a:defRPr sz="1800" kern="1200">
-        <a:solidFill>
-          <a:schemeClr val="tx1"/>
-        </a:solidFill>
-        <a:latin typeface="+mn-lt"/>
-        <a:ea typeface="+mn-ea"/>
-        <a:cs typeface="+mn-cs"/>
-      </a:defRPr>
-    </a:lvl9pPr>
-  </p:defaultTextStyle>
 </p:presentation>
 </file>
 
@@ -1453,7 +1358,26 @@
         <p:txBody>
           <a:bodyPr xmlns:a="http://schemas.openxmlformats.org/drawingml/2006/main"/>
           <a:lstStyle xmlns:a="http://schemas.openxmlformats.org/drawingml/2006/main"/>
-          <a:p xmlns:a="http://schemas.openxmlformats.org/drawingml/2006/main"/>
+          <a:p xmlns:a="http://schemas.openxmlformats.org/drawingml/2006/main">
+            <a:r>
+              <a:t>[Sources]</a:t>
+            </a:r>
+          </a:p>
+          <a:p xmlns:a="http://schemas.openxmlformats.org/drawingml/2006/main">
+            <a:r>
+              <a:t>- RPS mata kuliah Revisi AI 2026, Program Studi S2 Statistika Terapan FMIPA Universitas Padjadjaran.</a:t>
+            </a:r>
+          </a:p>
+          <a:p xmlns:a="http://schemas.openxmlformats.org/drawingml/2006/main">
+            <a:r>
+              <a:t>[/Sources]</a:t>
+            </a:r>
+          </a:p>
+          <a:p xmlns:a="http://schemas.openxmlformats.org/drawingml/2006/main">
+            <a:r>
+              <a:t>Penutup: CPL tetap. AI adalah akselerator ketercapaian CPMK/Sub-CPMK, bukan pengganti penalaran statistika. Tekankan kewajiban prompt log ringkas, sumber, kode/notebook reproducible, validasi, dan audit trail.</a:t>
+            </a:r>
+          </a:p>
         </p:txBody>
       </p:sp>
       <p:sp>
@@ -2010,8 +1934,8 @@
   </p:cSld>
   <p:clrMap bg1="lt1" tx1="dk1" bg2="lt2" tx2="dk2" accent1="accent1" accent2="accent2" accent3="accent3" accent4="accent4" accent5="accent5" accent6="accent6" hlink="hlink" folHlink="folHlink"/>
   <p:sldLayoutIdLst>
-    <p:sldLayoutId xmlns:r="http://schemas.openxmlformats.org/officeDocument/2006/relationships" id="2147483649" r:id="Rc0fbf72ce7c641a6"/>
-    <p:sldLayoutId xmlns:r="http://schemas.openxmlformats.org/officeDocument/2006/relationships" id="2147483650" r:id="R3f5563770b8b4832"/>
+    <p:sldLayoutId xmlns:r="http://schemas.openxmlformats.org/officeDocument/2006/relationships" id="2147483649" r:id="R2947f9a857c34231"/>
+    <p:sldLayoutId xmlns:r="http://schemas.openxmlformats.org/officeDocument/2006/relationships" id="2147483650" r:id="Ra92d84f482454d6c"/>
   </p:sldLayoutIdLst>
   <p:hf sldNum="0" hdr="0" ftr="0" dt="0"/>
   <p:txStyles>
@@ -2577,7 +2501,7 @@
           <p:nvPr/>
         </p:nvPicPr>
         <p:blipFill>
-          <a:blip xmlns:r="http://schemas.openxmlformats.org/officeDocument/2006/relationships" xmlns:a="http://schemas.openxmlformats.org/drawingml/2006/main" r:embed="R8f8dd0cf4da24201"/>
+          <a:blip xmlns:r="http://schemas.openxmlformats.org/officeDocument/2006/relationships" xmlns:a="http://schemas.openxmlformats.org/drawingml/2006/main" r:embed="R524443928aa54c5b"/>
           <a:stretch xmlns:a="http://schemas.openxmlformats.org/drawingml/2006/main">
             <a:fillRect l="0" t="0" r="0" b="0"/>
           </a:stretch>
@@ -2723,7 +2647,7 @@
           <p:nvPr/>
         </p:nvPicPr>
         <p:blipFill>
-          <a:blip xmlns:r="http://schemas.openxmlformats.org/officeDocument/2006/relationships" xmlns:a="http://schemas.openxmlformats.org/drawingml/2006/main" r:embed="R7b582ea77ad4482c"/>
+          <a:blip xmlns:r="http://schemas.openxmlformats.org/officeDocument/2006/relationships" xmlns:a="http://schemas.openxmlformats.org/drawingml/2006/main" r:embed="Rc56ac228b7494823"/>
           <a:stretch xmlns:a="http://schemas.openxmlformats.org/drawingml/2006/main">
             <a:fillRect l="0" t="0" r="0" b="0"/>
           </a:stretch>
@@ -3329,7 +3253,7 @@
           <p:nvPr/>
         </p:nvPicPr>
         <p:blipFill>
-          <a:blip xmlns:r="http://schemas.openxmlformats.org/officeDocument/2006/relationships" xmlns:a="http://schemas.openxmlformats.org/drawingml/2006/main" r:embed="R499f514a67ff4351"/>
+          <a:blip xmlns:r="http://schemas.openxmlformats.org/officeDocument/2006/relationships" xmlns:a="http://schemas.openxmlformats.org/drawingml/2006/main" r:embed="R553aabdc60574156"/>
           <a:stretch xmlns:a="http://schemas.openxmlformats.org/drawingml/2006/main">
             <a:fillRect l="0" t="0" r="0" b="0"/>
           </a:stretch>
@@ -5479,7 +5403,7 @@
           <p:nvPr/>
         </p:nvPicPr>
         <p:blipFill>
-          <a:blip xmlns:r="http://schemas.openxmlformats.org/officeDocument/2006/relationships" xmlns:a="http://schemas.openxmlformats.org/drawingml/2006/main" r:embed="R510fd87450dc4187"/>
+          <a:blip xmlns:r="http://schemas.openxmlformats.org/officeDocument/2006/relationships" xmlns:a="http://schemas.openxmlformats.org/drawingml/2006/main" r:embed="R43e14f87533043b7"/>
           <a:stretch xmlns:a="http://schemas.openxmlformats.org/drawingml/2006/main">
             <a:fillRect l="0" t="0" r="0" b="0"/>
           </a:stretch>
@@ -5758,7 +5682,7 @@
           <p:nvPr/>
         </p:nvPicPr>
         <p:blipFill>
-          <a:blip xmlns:r="http://schemas.openxmlformats.org/officeDocument/2006/relationships" xmlns:a="http://schemas.openxmlformats.org/drawingml/2006/main" r:embed="R9bf2494b278443e9"/>
+          <a:blip xmlns:r="http://schemas.openxmlformats.org/officeDocument/2006/relationships" xmlns:a="http://schemas.openxmlformats.org/drawingml/2006/main" r:embed="Rf1549a0d09c64299"/>
           <a:stretch xmlns:a="http://schemas.openxmlformats.org/drawingml/2006/main">
             <a:fillRect l="0" t="0" r="0" b="0"/>
           </a:stretch>
@@ -7292,7 +7216,7 @@
           <p:nvPr/>
         </p:nvPicPr>
         <p:blipFill>
-          <a:blip xmlns:r="http://schemas.openxmlformats.org/officeDocument/2006/relationships" xmlns:a="http://schemas.openxmlformats.org/drawingml/2006/main" r:embed="Rc5a2034a67184bc1"/>
+          <a:blip xmlns:r="http://schemas.openxmlformats.org/officeDocument/2006/relationships" xmlns:a="http://schemas.openxmlformats.org/drawingml/2006/main" r:embed="R3d3f1a60fa514e40"/>
           <a:stretch xmlns:a="http://schemas.openxmlformats.org/drawingml/2006/main">
             <a:fillRect l="0" t="0" r="0" b="0"/>
           </a:stretch>
@@ -8461,7 +8385,7 @@
           <p:nvPr/>
         </p:nvPicPr>
         <p:blipFill>
-          <a:blip xmlns:r="http://schemas.openxmlformats.org/officeDocument/2006/relationships" xmlns:a="http://schemas.openxmlformats.org/drawingml/2006/main" r:embed="Rc1a6f8b1faea4e4d"/>
+          <a:blip xmlns:r="http://schemas.openxmlformats.org/officeDocument/2006/relationships" xmlns:a="http://schemas.openxmlformats.org/drawingml/2006/main" r:embed="R2514eb7a0f1e4a2f"/>
           <a:stretch xmlns:a="http://schemas.openxmlformats.org/drawingml/2006/main">
             <a:fillRect l="0" t="0" r="0" b="0"/>
           </a:stretch>
@@ -9688,7 +9612,7 @@
           <p:nvPr/>
         </p:nvPicPr>
         <p:blipFill>
-          <a:blip xmlns:r="http://schemas.openxmlformats.org/officeDocument/2006/relationships" xmlns:a="http://schemas.openxmlformats.org/drawingml/2006/main" r:embed="R0716c8bead5e45fb"/>
+          <a:blip xmlns:r="http://schemas.openxmlformats.org/officeDocument/2006/relationships" xmlns:a="http://schemas.openxmlformats.org/drawingml/2006/main" r:embed="R9e21bc8867d34dad"/>
           <a:stretch xmlns:a="http://schemas.openxmlformats.org/drawingml/2006/main">
             <a:fillRect l="0" t="0" r="0" b="0"/>
           </a:stretch>
@@ -10893,7 +10817,7 @@
           <p:nvPr/>
         </p:nvPicPr>
         <p:blipFill>
-          <a:blip xmlns:r="http://schemas.openxmlformats.org/officeDocument/2006/relationships" xmlns:a="http://schemas.openxmlformats.org/drawingml/2006/main" r:embed="Rbd70270a89de429e"/>
+          <a:blip xmlns:r="http://schemas.openxmlformats.org/officeDocument/2006/relationships" xmlns:a="http://schemas.openxmlformats.org/drawingml/2006/main" r:embed="R0b3f5c9fe4284840"/>
           <a:stretch xmlns:a="http://schemas.openxmlformats.org/drawingml/2006/main">
             <a:fillRect l="0" t="0" r="0" b="0"/>
           </a:stretch>
@@ -11172,7 +11096,7 @@
           <p:nvPr/>
         </p:nvPicPr>
         <p:blipFill>
-          <a:blip xmlns:r="http://schemas.openxmlformats.org/officeDocument/2006/relationships" xmlns:a="http://schemas.openxmlformats.org/drawingml/2006/main" r:embed="R3ce06af10c584265"/>
+          <a:blip xmlns:r="http://schemas.openxmlformats.org/officeDocument/2006/relationships" xmlns:a="http://schemas.openxmlformats.org/drawingml/2006/main" r:embed="R2b40109f666d4f2d"/>
           <a:stretch xmlns:a="http://schemas.openxmlformats.org/drawingml/2006/main">
             <a:fillRect l="0" t="0" r="0" b="0"/>
           </a:stretch>
@@ -12717,7 +12641,7 @@
           <p:nvPr/>
         </p:nvPicPr>
         <p:blipFill>
-          <a:blip xmlns:r="http://schemas.openxmlformats.org/officeDocument/2006/relationships" xmlns:a="http://schemas.openxmlformats.org/drawingml/2006/main" r:embed="Rf3ab9c1cc716489a"/>
+          <a:blip xmlns:r="http://schemas.openxmlformats.org/officeDocument/2006/relationships" xmlns:a="http://schemas.openxmlformats.org/drawingml/2006/main" r:embed="Ra0f8dfcd679f486a"/>
           <a:stretch xmlns:a="http://schemas.openxmlformats.org/drawingml/2006/main">
             <a:fillRect l="0" t="0" r="0" b="0"/>
           </a:stretch>
@@ -14734,7 +14658,7 @@
           <p:nvPr/>
         </p:nvPicPr>
         <p:blipFill>
-          <a:blip xmlns:r="http://schemas.openxmlformats.org/officeDocument/2006/relationships" xmlns:a="http://schemas.openxmlformats.org/drawingml/2006/main" r:embed="Rc128b501a0084e7e"/>
+          <a:blip xmlns:r="http://schemas.openxmlformats.org/officeDocument/2006/relationships" xmlns:a="http://schemas.openxmlformats.org/drawingml/2006/main" r:embed="Rfc7918e9725b41ef"/>
           <a:stretch xmlns:a="http://schemas.openxmlformats.org/drawingml/2006/main">
             <a:fillRect l="0" t="0" r="0" b="0"/>
           </a:stretch>
@@ -15961,7 +15885,7 @@
           <p:nvPr/>
         </p:nvPicPr>
         <p:blipFill>
-          <a:blip xmlns:r="http://schemas.openxmlformats.org/officeDocument/2006/relationships" xmlns:a="http://schemas.openxmlformats.org/drawingml/2006/main" r:embed="R466a9404512f484d"/>
+          <a:blip xmlns:r="http://schemas.openxmlformats.org/officeDocument/2006/relationships" xmlns:a="http://schemas.openxmlformats.org/drawingml/2006/main" r:embed="R3bdc5ec3fcf24ec2"/>
           <a:stretch xmlns:a="http://schemas.openxmlformats.org/drawingml/2006/main">
             <a:fillRect l="0" t="0" r="0" b="0"/>
           </a:stretch>
@@ -17102,7 +17026,7 @@
           <p:nvPr/>
         </p:nvPicPr>
         <p:blipFill>
-          <a:blip xmlns:r="http://schemas.openxmlformats.org/officeDocument/2006/relationships" xmlns:a="http://schemas.openxmlformats.org/drawingml/2006/main" r:embed="R90bfe065ea9a4136"/>
+          <a:blip xmlns:r="http://schemas.openxmlformats.org/officeDocument/2006/relationships" xmlns:a="http://schemas.openxmlformats.org/drawingml/2006/main" r:embed="R03b6a0ca43684359"/>
           <a:stretch xmlns:a="http://schemas.openxmlformats.org/drawingml/2006/main">
             <a:fillRect l="0" t="0" r="0" b="0"/>
           </a:stretch>
@@ -18567,7 +18491,7 @@
           <p:nvPr/>
         </p:nvPicPr>
         <p:blipFill>
-          <a:blip xmlns:r="http://schemas.openxmlformats.org/officeDocument/2006/relationships" xmlns:a="http://schemas.openxmlformats.org/drawingml/2006/main" r:embed="Rf8e0f7fbe5f14836"/>
+          <a:blip xmlns:r="http://schemas.openxmlformats.org/officeDocument/2006/relationships" xmlns:a="http://schemas.openxmlformats.org/drawingml/2006/main" r:embed="Rfe9807fc674844fc"/>
           <a:stretch xmlns:a="http://schemas.openxmlformats.org/drawingml/2006/main">
             <a:fillRect l="0" t="0" r="0" b="0"/>
           </a:stretch>
@@ -18713,7 +18637,7 @@
           <p:nvPr/>
         </p:nvPicPr>
         <p:blipFill>
-          <a:blip xmlns:r="http://schemas.openxmlformats.org/officeDocument/2006/relationships" xmlns:a="http://schemas.openxmlformats.org/drawingml/2006/main" r:embed="R8ee8c2dc464942e0"/>
+          <a:blip xmlns:r="http://schemas.openxmlformats.org/officeDocument/2006/relationships" xmlns:a="http://schemas.openxmlformats.org/drawingml/2006/main" r:embed="R6d055898fc02498d"/>
           <a:stretch xmlns:a="http://schemas.openxmlformats.org/drawingml/2006/main">
             <a:fillRect l="0" t="0" r="0" b="0"/>
           </a:stretch>
@@ -18817,7 +18741,7 @@
                 <a:ea typeface="Aptos Display"/>
                 <a:cs typeface="Aptos Display"/>
               </a:rPr>
-              <a:t>Dari data menuju</a:t>
+              <a:t>AI mempercepat proses,</a:t>
             </a:r>
           </a:p>
           <a:p xmlns:a="http://schemas.openxmlformats.org/drawingml/2006/main">
@@ -18833,7 +18757,7 @@
                 <a:ea typeface="Aptos Display"/>
                 <a:cs typeface="Aptos Display"/>
               </a:rPr>
-              <a:t>keputusan yang dapat diuji</a:t>
+              <a:t>penalaran tetap memimpin</a:t>
             </a:r>
           </a:p>
         </p:txBody>
@@ -18900,7 +18824,7 @@
         </p:spPr>
         <p:txBody>
           <a:bodyPr xmlns:a="http://schemas.openxmlformats.org/drawingml/2006/main" wrap="square" lIns="635" tIns="635" rIns="635" bIns="635" anchor="t">
-            <a:normAutofit fontScale="100000"/>
+            <a:normAutofit fontScale="93620"/>
           </a:bodyPr>
           <a:lstStyle xmlns:a="http://schemas.openxmlformats.org/drawingml/2006/main"/>
           <a:p xmlns:a="http://schemas.openxmlformats.org/drawingml/2006/main">
@@ -18916,7 +18840,7 @@
                 <a:ea typeface="Aptos"/>
                 <a:cs typeface="Aptos"/>
               </a:rPr>
-              <a:t>Analisis Survival menghubungkan teori, data, metode, validasi, dan komunikasi untuk menghasilkan keputusan yang sahih, dapat direplikasi, dan bertanggung jawab.</a:t>
+              <a:t>Analisis Survival memadukan teori, data, komputasi, validasi, dan komunikasi. AI mempercepat eksplorasi dan pemeriksaan awal; mahasiswa tetap memverifikasi asumsi, kode, hasil numerik, ketidakpastian, sumber, dan dampak sebelum mengambil keputusan.</a:t>
             </a:r>
           </a:p>
         </p:txBody>
@@ -19086,7 +19010,7 @@
           <p:nvPr/>
         </p:nvPicPr>
         <p:blipFill>
-          <a:blip xmlns:r="http://schemas.openxmlformats.org/officeDocument/2006/relationships" xmlns:a="http://schemas.openxmlformats.org/drawingml/2006/main" r:embed="Rca213a5d58b84964"/>
+          <a:blip xmlns:r="http://schemas.openxmlformats.org/officeDocument/2006/relationships" xmlns:a="http://schemas.openxmlformats.org/drawingml/2006/main" r:embed="R21db7a1033da440f"/>
           <a:stretch xmlns:a="http://schemas.openxmlformats.org/drawingml/2006/main">
             <a:fillRect l="0" t="0" r="0" b="0"/>
           </a:stretch>
@@ -20217,7 +20141,7 @@
           <p:nvPr/>
         </p:nvPicPr>
         <p:blipFill>
-          <a:blip xmlns:r="http://schemas.openxmlformats.org/officeDocument/2006/relationships" xmlns:a="http://schemas.openxmlformats.org/drawingml/2006/main" r:embed="Rd880893de9a34879"/>
+          <a:blip xmlns:r="http://schemas.openxmlformats.org/officeDocument/2006/relationships" xmlns:a="http://schemas.openxmlformats.org/drawingml/2006/main" r:embed="Rf4b2d465385b44c6"/>
           <a:stretch xmlns:a="http://schemas.openxmlformats.org/drawingml/2006/main">
             <a:fillRect l="0" t="0" r="0" b="0"/>
           </a:stretch>
@@ -22321,7 +22245,7 @@
           <p:nvPr/>
         </p:nvPicPr>
         <p:blipFill>
-          <a:blip xmlns:r="http://schemas.openxmlformats.org/officeDocument/2006/relationships" xmlns:a="http://schemas.openxmlformats.org/drawingml/2006/main" r:embed="R2c80de7a70ab4217"/>
+          <a:blip xmlns:r="http://schemas.openxmlformats.org/officeDocument/2006/relationships" xmlns:a="http://schemas.openxmlformats.org/drawingml/2006/main" r:embed="R18de15a2a7a742ac"/>
           <a:stretch xmlns:a="http://schemas.openxmlformats.org/drawingml/2006/main">
             <a:fillRect l="0" t="0" r="0" b="0"/>
           </a:stretch>
@@ -23603,7 +23527,7 @@
           <p:nvPr/>
         </p:nvPicPr>
         <p:blipFill>
-          <a:blip xmlns:r="http://schemas.openxmlformats.org/officeDocument/2006/relationships" xmlns:a="http://schemas.openxmlformats.org/drawingml/2006/main" r:embed="Rfc7f493e49bd4f7a"/>
+          <a:blip xmlns:r="http://schemas.openxmlformats.org/officeDocument/2006/relationships" xmlns:a="http://schemas.openxmlformats.org/drawingml/2006/main" r:embed="Rb98c7876a5884bd7"/>
           <a:stretch xmlns:a="http://schemas.openxmlformats.org/drawingml/2006/main">
             <a:fillRect l="0" t="0" r="0" b="0"/>
           </a:stretch>
@@ -23882,7 +23806,7 @@
           <p:nvPr/>
         </p:nvPicPr>
         <p:blipFill>
-          <a:blip xmlns:r="http://schemas.openxmlformats.org/officeDocument/2006/relationships" xmlns:a="http://schemas.openxmlformats.org/drawingml/2006/main" r:embed="R890052bf218f4d59"/>
+          <a:blip xmlns:r="http://schemas.openxmlformats.org/officeDocument/2006/relationships" xmlns:a="http://schemas.openxmlformats.org/drawingml/2006/main" r:embed="R51e85e51d4b24436"/>
           <a:stretch xmlns:a="http://schemas.openxmlformats.org/drawingml/2006/main">
             <a:fillRect l="0" t="0" r="0" b="0"/>
           </a:stretch>
@@ -25962,7 +25886,7 @@
           <p:nvPr/>
         </p:nvPicPr>
         <p:blipFill>
-          <a:blip xmlns:r="http://schemas.openxmlformats.org/officeDocument/2006/relationships" xmlns:a="http://schemas.openxmlformats.org/drawingml/2006/main" r:embed="R94a709e7ba524858"/>
+          <a:blip xmlns:r="http://schemas.openxmlformats.org/officeDocument/2006/relationships" xmlns:a="http://schemas.openxmlformats.org/drawingml/2006/main" r:embed="Rd970ff4eef784dd4"/>
           <a:stretch xmlns:a="http://schemas.openxmlformats.org/drawingml/2006/main">
             <a:fillRect l="0" t="0" r="0" b="0"/>
           </a:stretch>
@@ -27375,7 +27299,7 @@
           <p:nvPr/>
         </p:nvPicPr>
         <p:blipFill>
-          <a:blip xmlns:r="http://schemas.openxmlformats.org/officeDocument/2006/relationships" xmlns:a="http://schemas.openxmlformats.org/drawingml/2006/main" r:embed="R87511613faf74c86"/>
+          <a:blip xmlns:r="http://schemas.openxmlformats.org/officeDocument/2006/relationships" xmlns:a="http://schemas.openxmlformats.org/drawingml/2006/main" r:embed="R71f33449c9ab4729"/>
           <a:stretch xmlns:a="http://schemas.openxmlformats.org/drawingml/2006/main">
             <a:fillRect l="0" t="0" r="0" b="0"/>
           </a:stretch>
